--- a/dist/초4/사회·역사/지도와지역/초4_사회·역사_지도와지역_02_촌락과도시.pptx
+++ b/dist/초4/사회·역사/지도와지역/초4_사회·역사_지도와지역_02_촌락과도시.pptx
@@ -121,13 +121,13 @@
   <p:extLst>
     <p:ext uri="{521415D9-36F7-43E2-AB2F-B90AF26B5E84}">
       <p14:sectionLst xmlns:p14="http://schemas.microsoft.com/office/powerpoint/2010/main">
-        <p14:section name="도입" id="{d0e03952-3574-178d-03da-39fc6d90138c}">
+        <p14:section name="도입" id="{bb94c3f0-6fb0-20dd-535c-2f076431c933}">
           <p14:sldIdLst>
             <p14:sldId id="256"/>
             <p14:sldId id="257"/>
           </p14:sldIdLst>
         </p14:section>
-        <p14:section name="개념" id="{c1add382-db61-d6be-0aa0-4509778cc1b0}">
+        <p14:section name="개념" id="{370fb194-f735-0947-3384-7b2a6a52c88c}">
           <p14:sldIdLst>
             <p14:sldId id="258"/>
             <p14:sldId id="259"/>
@@ -135,7 +135,7 @@
             <p14:sldId id="263"/>
           </p14:sldIdLst>
         </p14:section>
-        <p14:section name="연습" id="{e2a022e6-d7cf-19b0-621d-98b320017496}">
+        <p14:section name="연습" id="{80f2bd24-45da-0422-3c2e-c18a131662f4}">
           <p14:sldIdLst>
             <p14:sldId id="260"/>
             <p14:sldId id="262"/>
@@ -143,31 +143,31 @@
             <p14:sldId id="265"/>
           </p14:sldIdLst>
         </p14:section>
-        <p14:section name="개념" id="{eef252e9-edb9-75cb-c1c4-40aca7363ac4}">
+        <p14:section name="개념" id="{978da0fa-c656-0b22-601d-56b884e919a2}">
           <p14:sldIdLst/>
         </p14:section>
-        <p14:section name="연습" id="{63949aa2-e9ac-3bf6-96e6-33bcd6d2eec9}">
+        <p14:section name="연습" id="{050a9874-3594-e790-d8e4-c0f37b15154c}">
           <p14:sldIdLst/>
         </p14:section>
-        <p14:section name="개념" id="{69e74a25-f1e6-2d5e-b942-2d4473080f47}">
+        <p14:section name="개념" id="{400b5c1d-4863-e85d-e232-5161ae662700}">
           <p14:sldIdLst/>
         </p14:section>
-        <p14:section name="연습" id="{14c58ca2-066a-502a-f12c-4637ff5e9426}">
+        <p14:section name="연습" id="{7325b599-a7b7-f209-2908-637a5e168f81}">
           <p14:sldIdLst/>
         </p14:section>
-        <p14:section name="확인" id="{2425135d-b720-4cc3-313c-e4e36ed35f70}">
+        <p14:section name="확인" id="{7d600aae-b237-c89b-acb5-b8d0e36080b9}">
           <p14:sldIdLst>
             <p14:sldId id="266"/>
             <p14:sldId id="267"/>
             <p14:sldId id="268"/>
           </p14:sldIdLst>
         </p14:section>
-        <p14:section name="정리" id="{7f9e66ac-72f2-df6d-935a-34b7de1ca26a}">
+        <p14:section name="정리" id="{45502010-3515-c1ee-fabb-5851e4a92918}">
           <p14:sldIdLst>
             <p14:sldId id="269"/>
           </p14:sldIdLst>
         </p14:section>
-        <p14:section name="보충" id="{13b13500-71ad-c4bb-67fb-d340b24ddadd}">
+        <p14:section name="보충" id="{13adaafd-e5e5-3e0b-ba83-5fc0b1b509dc}">
           <p14:sldIdLst>
             <p14:sldId id="270"/>
           </p14:sldIdLst>

--- a/dist/초4/사회·역사/지도와지역/초4_사회·역사_지도와지역_02_촌락과도시.pptx
+++ b/dist/초4/사회·역사/지도와지역/초4_사회·역사_지도와지역_02_촌락과도시.pptx
@@ -121,13 +121,13 @@
   <p:extLst>
     <p:ext uri="{521415D9-36F7-43E2-AB2F-B90AF26B5E84}">
       <p14:sectionLst xmlns:p14="http://schemas.microsoft.com/office/powerpoint/2010/main">
-        <p14:section name="도입" id="{bb94c3f0-6fb0-20dd-535c-2f076431c933}">
+        <p14:section name="도입" id="{48681a8f-c4ae-9196-8cc3-afedb3fea61c}">
           <p14:sldIdLst>
             <p14:sldId id="256"/>
             <p14:sldId id="257"/>
           </p14:sldIdLst>
         </p14:section>
-        <p14:section name="개념" id="{370fb194-f735-0947-3384-7b2a6a52c88c}">
+        <p14:section name="개념" id="{aee03c72-c086-b217-b876-44d957784d71}">
           <p14:sldIdLst>
             <p14:sldId id="258"/>
             <p14:sldId id="259"/>
@@ -135,7 +135,7 @@
             <p14:sldId id="263"/>
           </p14:sldIdLst>
         </p14:section>
-        <p14:section name="연습" id="{80f2bd24-45da-0422-3c2e-c18a131662f4}">
+        <p14:section name="연습" id="{738e7b1a-2368-7342-950f-42d11c6a3493}">
           <p14:sldIdLst>
             <p14:sldId id="260"/>
             <p14:sldId id="262"/>
@@ -143,31 +143,31 @@
             <p14:sldId id="265"/>
           </p14:sldIdLst>
         </p14:section>
-        <p14:section name="개념" id="{978da0fa-c656-0b22-601d-56b884e919a2}">
+        <p14:section name="개념" id="{05f3f992-c63b-ad85-713f-a9cdb150b068}">
           <p14:sldIdLst/>
         </p14:section>
-        <p14:section name="연습" id="{050a9874-3594-e790-d8e4-c0f37b15154c}">
+        <p14:section name="연습" id="{2c9848ce-db20-0ad4-c441-0ea4c5f03c61}">
           <p14:sldIdLst/>
         </p14:section>
-        <p14:section name="개념" id="{400b5c1d-4863-e85d-e232-5161ae662700}">
+        <p14:section name="개념" id="{7749dde7-ba2e-994f-e471-c482655e6b27}">
           <p14:sldIdLst/>
         </p14:section>
-        <p14:section name="연습" id="{7325b599-a7b7-f209-2908-637a5e168f81}">
+        <p14:section name="연습" id="{300950a0-6a21-7b06-de5a-371082c8fe89}">
           <p14:sldIdLst/>
         </p14:section>
-        <p14:section name="확인" id="{7d600aae-b237-c89b-acb5-b8d0e36080b9}">
+        <p14:section name="확인" id="{eee30197-12ed-50fe-c397-c96aecfc7878}">
           <p14:sldIdLst>
             <p14:sldId id="266"/>
             <p14:sldId id="267"/>
             <p14:sldId id="268"/>
           </p14:sldIdLst>
         </p14:section>
-        <p14:section name="정리" id="{45502010-3515-c1ee-fabb-5851e4a92918}">
+        <p14:section name="정리" id="{ceb57019-4345-66a7-38d0-c1193b556b37}">
           <p14:sldIdLst>
             <p14:sldId id="269"/>
           </p14:sldIdLst>
         </p14:section>
-        <p14:section name="보충" id="{13adaafd-e5e5-3e0b-ba83-5fc0b1b509dc}">
+        <p14:section name="보충" id="{a6fa93e1-c9e3-f73c-a22b-d46b02b243f7}">
           <p14:sldIdLst>
             <p14:sldId id="270"/>
           </p14:sldIdLst>
